--- a/Презентация-Alem-Expert-Router.pptx
+++ b/Презентация-Alem-Expert-Router.pptx
@@ -6023,7 +6023,7 @@
                 <a:ea typeface="Arial" pitchFamily="34" charset="-122"/>
                 <a:cs typeface="Arial" pitchFamily="34" charset="-120"/>
               </a:rPr>
-              <a:t>15</a:t>
+              <a:t>20</a:t>
             </a:r>
             <a:endParaRPr lang="en-US" sz="4000" dirty="0"/>
           </a:p>
@@ -6130,7 +6130,7 @@
                 <a:ea typeface="Arial" pitchFamily="34" charset="-122"/>
                 <a:cs typeface="Arial" pitchFamily="34" charset="-120"/>
               </a:rPr>
-              <a:t>8</a:t>
+              <a:t>AI</a:t>
             </a:r>
             <a:endParaRPr lang="en-US" sz="4000" dirty="0"/>
           </a:p>
@@ -6169,7 +6169,7 @@
                 <a:ea typeface="Arial" pitchFamily="34" charset="-122"/>
                 <a:cs typeface="Arial" pitchFamily="34" charset="-120"/>
               </a:rPr>
-              <a:t>API-эндпоинтов</a:t>
+              <a:t>навыки из текста заявки</a:t>
             </a:r>
             <a:endParaRPr lang="en-US" sz="1500" dirty="0"/>
           </a:p>
@@ -6237,7 +6237,7 @@
                 <a:ea typeface="Arial" pitchFamily="34" charset="-122"/>
                 <a:cs typeface="Arial" pitchFamily="34" charset="-120"/>
               </a:rPr>
-              <a:t>100%</a:t>
+              <a:t>web</a:t>
             </a:r>
             <a:endParaRPr lang="en-US" sz="4000" dirty="0"/>
           </a:p>
@@ -6276,7 +6276,7 @@
                 <a:ea typeface="Arial" pitchFamily="34" charset="-122"/>
                 <a:cs typeface="Arial" pitchFamily="34" charset="-120"/>
               </a:rPr>
-              <a:t>объяснимость назначений</a:t>
+              <a:t>приложение + БД (SQLite)</a:t>
             </a:r>
             <a:endParaRPr lang="en-US" sz="1500" dirty="0"/>
           </a:p>
@@ -6307,7 +6307,7 @@
               <a:buNone/>
             </a:pPr>
             <a:r>
-              <a:rPr lang="en-US" sz="1400" b="1" dirty="0">
+              <a:rPr lang="en-US" sz="1250" b="1" dirty="0">
                 <a:solidFill>
                   <a:srgbClr val="1F2340"/>
                 </a:solidFill>
@@ -6315,13 +6315,13 @@
                 <a:ea typeface="Arial" pitchFamily="34" charset="-122"/>
                 <a:cs typeface="Arial" pitchFamily="34" charset="-120"/>
               </a:rPr>
-              <a:t>Не идея — запущенный код.  </a:t>
+              <a:t>Открыть вживую:  </a:t>
             </a:r>
             <a:pPr indent="0" marL="0">
               <a:buNone/>
             </a:pPr>
             <a:r>
-              <a:rPr lang="en-US" sz="1400" dirty="0">
+              <a:rPr lang="en-US" sz="1250" dirty="0">
                 <a:solidFill>
                   <a:srgbClr val="6C5CE7"/>
                 </a:solidFill>
@@ -6329,9 +6329,9 @@
                 <a:ea typeface="Arial" pitchFamily="34" charset="-122"/>
                 <a:cs typeface="Arial" pitchFamily="34" charset="-120"/>
               </a:rPr>
-              <a:t>github.com/wpalish</a:t>
-            </a:r>
-            <a:endParaRPr lang="en-US" sz="1400" dirty="0"/>
+              <a:t>wpalish.github.io/alem-expert-router</a:t>
+            </a:r>
+            <a:endParaRPr lang="en-US" sz="1250" dirty="0"/>
           </a:p>
         </p:txBody>
       </p:sp>
@@ -7502,7 +7502,7 @@
                 <a:ea typeface="Arial" pitchFamily="34" charset="-122"/>
                 <a:cs typeface="Arial" pitchFamily="34" charset="-120"/>
               </a:rPr>
-              <a:t>MVP — готово</a:t>
+              <a:t>Готово</a:t>
             </a:r>
             <a:endParaRPr lang="en-US" sz="2200" dirty="0"/>
           </a:p>
@@ -7662,7 +7662,7 @@
                 <a:ea typeface="Arial" pitchFamily="34" charset="-122"/>
                 <a:cs typeface="Arial" pitchFamily="34" charset="-120"/>
               </a:rPr>
-              <a:t>Движок матчинга, REST API, дашборд, 15 тестов.</a:t>
+              <a:t>Движок матчинга, REST API, дашборд, 20 автотестов.</a:t>
             </a:r>
             <a:endParaRPr lang="en-US" sz="1450" dirty="0"/>
           </a:p>
@@ -7724,7 +7724,7 @@
             </a:avLst>
           </a:prstGeom>
           <a:solidFill>
-            <a:srgbClr val="FFFFFF"/>
+            <a:srgbClr val="EEF0FB"/>
           </a:solidFill>
           <a:ln/>
           <a:effectLst>
@@ -7802,13 +7802,13 @@
             <a:r>
               <a:rPr lang="en-US" sz="2200" b="1" dirty="0">
                 <a:solidFill>
-                  <a:srgbClr val="1F2340"/>
-                </a:solidFill>
-                <a:latin typeface="Arial" pitchFamily="34" charset="0"/>
-                <a:ea typeface="Arial" pitchFamily="34" charset="-122"/>
-                <a:cs typeface="Arial" pitchFamily="34" charset="-120"/>
-              </a:rPr>
-              <a:t>Продукт</a:t>
+                  <a:srgbClr val="16A34A"/>
+                </a:solidFill>
+                <a:latin typeface="Arial" pitchFamily="34" charset="0"/>
+                <a:ea typeface="Arial" pitchFamily="34" charset="-122"/>
+                <a:cs typeface="Arial" pitchFamily="34" charset="-120"/>
+              </a:rPr>
+              <a:t>Готово</a:t>
             </a:r>
             <a:endParaRPr lang="en-US" sz="2200" dirty="0"/>
           </a:p>
@@ -7816,13 +7816,131 @@
       </p:sp>
       <p:sp>
         <p:nvSpPr>
-          <p:cNvPr id="15" name="Text 13"/>
-          <p:cNvSpPr/>
-          <p:nvPr/>
-        </p:nvSpPr>
-        <p:spPr>
-          <a:xfrm>
-            <a:off x="4690872" y="3017520"/>
+          <p:cNvPr id="15" name="Shape 13"/>
+          <p:cNvSpPr/>
+          <p:nvPr/>
+        </p:nvSpPr>
+        <p:spPr>
+          <a:xfrm>
+            <a:off x="4690872" y="2971800"/>
+            <a:ext cx="502920" cy="502920"/>
+          </a:xfrm>
+          <a:prstGeom prst="ellipse">
+            <a:avLst/>
+          </a:prstGeom>
+          <a:solidFill>
+            <a:srgbClr val="6C5CE7"/>
+          </a:solidFill>
+          <a:ln/>
+        </p:spPr>
+      </p:sp>
+      <p:sp>
+        <p:nvSpPr>
+          <p:cNvPr id="16" name="Text 14"/>
+          <p:cNvSpPr/>
+          <p:nvPr/>
+        </p:nvSpPr>
+        <p:spPr>
+          <a:xfrm>
+            <a:off x="4690872" y="2971800"/>
+            <a:ext cx="502920" cy="502920"/>
+          </a:xfrm>
+          <a:prstGeom prst="rect">
+            <a:avLst/>
+          </a:prstGeom>
+          <a:noFill/>
+          <a:ln/>
+        </p:spPr>
+        <p:txBody>
+          <a:bodyPr wrap="square" lIns="0" tIns="0" rIns="0" bIns="0" rtlCol="0" anchor="ctr"/>
+          <a:lstStyle/>
+          <a:p>
+            <a:pPr algn="ctr" indent="0" marL="0">
+              <a:buNone/>
+            </a:pPr>
+            <a:r>
+              <a:rPr lang="en-US" sz="1800" b="1" dirty="0">
+                <a:solidFill>
+                  <a:srgbClr val="FFFFFF"/>
+                </a:solidFill>
+                <a:latin typeface="Arial" pitchFamily="34" charset="0"/>
+                <a:ea typeface="Arial" pitchFamily="34" charset="-122"/>
+                <a:cs typeface="Arial" pitchFamily="34" charset="-120"/>
+              </a:rPr>
+              <a:t>✓</a:t>
+            </a:r>
+            <a:endParaRPr lang="en-US" sz="1800" dirty="0"/>
+          </a:p>
+        </p:txBody>
+      </p:sp>
+      <p:sp>
+        <p:nvSpPr>
+          <p:cNvPr id="17" name="Shape 15"/>
+          <p:cNvSpPr/>
+          <p:nvPr/>
+        </p:nvSpPr>
+        <p:spPr>
+          <a:xfrm>
+            <a:off x="4690872" y="2971800"/>
+            <a:ext cx="502920" cy="502920"/>
+          </a:xfrm>
+          <a:prstGeom prst="ellipse">
+            <a:avLst/>
+          </a:prstGeom>
+          <a:solidFill>
+            <a:srgbClr val="16A34A"/>
+          </a:solidFill>
+          <a:ln/>
+        </p:spPr>
+      </p:sp>
+      <p:sp>
+        <p:nvSpPr>
+          <p:cNvPr id="18" name="Text 16"/>
+          <p:cNvSpPr/>
+          <p:nvPr/>
+        </p:nvSpPr>
+        <p:spPr>
+          <a:xfrm>
+            <a:off x="4690872" y="2971800"/>
+            <a:ext cx="502920" cy="502920"/>
+          </a:xfrm>
+          <a:prstGeom prst="rect">
+            <a:avLst/>
+          </a:prstGeom>
+          <a:noFill/>
+          <a:ln/>
+        </p:spPr>
+        <p:txBody>
+          <a:bodyPr wrap="square" lIns="0" tIns="0" rIns="0" bIns="0" rtlCol="0" anchor="ctr"/>
+          <a:lstStyle/>
+          <a:p>
+            <a:pPr algn="ctr" indent="0" marL="0">
+              <a:buNone/>
+            </a:pPr>
+            <a:r>
+              <a:rPr lang="en-US" sz="1800" b="1" dirty="0">
+                <a:solidFill>
+                  <a:srgbClr val="FFFFFF"/>
+                </a:solidFill>
+                <a:latin typeface="Arial" pitchFamily="34" charset="0"/>
+                <a:ea typeface="Arial" pitchFamily="34" charset="-122"/>
+                <a:cs typeface="Arial" pitchFamily="34" charset="-120"/>
+              </a:rPr>
+              <a:t>✓</a:t>
+            </a:r>
+            <a:endParaRPr lang="en-US" sz="1800" dirty="0"/>
+          </a:p>
+        </p:txBody>
+      </p:sp>
+      <p:sp>
+        <p:nvSpPr>
+          <p:cNvPr id="19" name="Text 17"/>
+          <p:cNvSpPr/>
+          <p:nvPr/>
+        </p:nvSpPr>
+        <p:spPr>
+          <a:xfrm>
+            <a:off x="4690872" y="3657600"/>
             <a:ext cx="2834640" cy="1645920"/>
           </a:xfrm>
           <a:prstGeom prst="rect">
@@ -7850,7 +7968,7 @@
                 <a:ea typeface="Arial" pitchFamily="34" charset="-122"/>
                 <a:cs typeface="Arial" pitchFamily="34" charset="-120"/>
               </a:rPr>
-              <a:t>БД, кабинет подачи заявок, роли и уведомления.</a:t>
+              <a:t>SQLite, веб-приложение (CRUD), AI-извлечение компетенций из текста.</a:t>
             </a:r>
             <a:endParaRPr lang="en-US" sz="1450" dirty="0"/>
           </a:p>
@@ -7858,7 +7976,7 @@
       </p:sp>
       <p:sp>
         <p:nvSpPr>
-          <p:cNvPr id="16" name="Text 14"/>
+          <p:cNvPr id="20" name="Text 18"/>
           <p:cNvSpPr/>
           <p:nvPr/>
         </p:nvSpPr>
@@ -7897,7 +8015,7 @@
       </p:sp>
       <p:sp>
         <p:nvSpPr>
-          <p:cNvPr id="17" name="Shape 15"/>
+          <p:cNvPr id="21" name="Shape 19"/>
           <p:cNvSpPr/>
           <p:nvPr/>
         </p:nvSpPr>
@@ -7926,7 +8044,7 @@
       </p:sp>
       <p:sp>
         <p:nvSpPr>
-          <p:cNvPr id="18" name="Text 16"/>
+          <p:cNvPr id="22" name="Text 20"/>
           <p:cNvSpPr/>
           <p:nvPr/>
         </p:nvSpPr>
@@ -7965,7 +8083,7 @@
       </p:sp>
       <p:sp>
         <p:nvSpPr>
-          <p:cNvPr id="19" name="Text 17"/>
+          <p:cNvPr id="23" name="Text 21"/>
           <p:cNvSpPr/>
           <p:nvPr/>
         </p:nvSpPr>
@@ -7996,7 +8114,7 @@
                 <a:ea typeface="Arial" pitchFamily="34" charset="-122"/>
                 <a:cs typeface="Arial" pitchFamily="34" charset="-120"/>
               </a:rPr>
-              <a:t>AI-слой</a:t>
+              <a:t>Дальше</a:t>
             </a:r>
             <a:endParaRPr lang="en-US" sz="2200" dirty="0"/>
           </a:p>
@@ -8004,7 +8122,7 @@
       </p:sp>
       <p:sp>
         <p:nvSpPr>
-          <p:cNvPr id="20" name="Text 18"/>
+          <p:cNvPr id="24" name="Text 22"/>
           <p:cNvSpPr/>
           <p:nvPr/>
         </p:nvSpPr>
@@ -8038,7 +8156,7 @@
                 <a:ea typeface="Arial" pitchFamily="34" charset="-122"/>
                 <a:cs typeface="Arial" pitchFamily="34" charset="-120"/>
               </a:rPr>
-              <a:t>Заявку пишут текстом → LLM извлекает компетенции; прогноз сроков, авто-ребаланс.</a:t>
+              <a:t>Роли и авторизация, уведомления, прогноз сроков, авто-ребаланс нагрузки.</a:t>
             </a:r>
             <a:endParaRPr lang="en-US" sz="1450" dirty="0"/>
           </a:p>
@@ -8567,7 +8685,7 @@
                 <a:ea typeface="Arial" pitchFamily="34" charset="-122"/>
                 <a:cs typeface="Arial" pitchFamily="34" charset="-120"/>
               </a:rPr>
-              <a:t>Код прототипа:  github.com/wpalish/alem-expert-router</a:t>
+              <a:t>Живое демо (открыть в браузере):  wpalish.github.io/alem-expert-router</a:t>
             </a:r>
             <a:endParaRPr lang="en-US" sz="1600" dirty="0"/>
           </a:p>
@@ -8606,7 +8724,7 @@
                 <a:ea typeface="Arial" pitchFamily="34" charset="-122"/>
                 <a:cs typeface="Arial" pitchFamily="34" charset="-120"/>
               </a:rPr>
-              <a:t>Профиль:  github.com/wpalish</a:t>
+              <a:t>Код на GitHub:  github.com/wpalish/alem-expert-router</a:t>
             </a:r>
             <a:endParaRPr lang="en-US" sz="1600" dirty="0"/>
           </a:p>
@@ -8645,7 +8763,7 @@
                 <a:ea typeface="Arial" pitchFamily="34" charset="-122"/>
                 <a:cs typeface="Arial" pitchFamily="34" charset="-120"/>
               </a:rPr>
-              <a:t>Демо:  wpalish.github.io/ai-studio</a:t>
+              <a:t>Профиль:  github.com/wpalish   ·   alisher.nursain@gmail.com</a:t>
             </a:r>
             <a:endParaRPr lang="en-US" sz="1600" dirty="0"/>
           </a:p>
@@ -8684,7 +8802,7 @@
                 <a:ea typeface="Arial" pitchFamily="34" charset="-122"/>
                 <a:cs typeface="Arial" pitchFamily="34" charset="-120"/>
               </a:rPr>
-              <a:t>Почта:  alisher.nursain@gmail.com   ·   +7 701 466 4316</a:t>
+              <a:t>Телефон:  +7 701 466 4316</a:t>
             </a:r>
             <a:endParaRPr lang="en-US" sz="1600" dirty="0"/>
           </a:p>

--- a/Презентация-Alem-Expert-Router.pptx
+++ b/Презентация-Alem-Expert-Router.pptx
@@ -3947,7 +3947,7 @@
                 <a:ea typeface="Arial" pitchFamily="34" charset="-122"/>
                 <a:cs typeface="Arial" pitchFamily="34" charset="-120"/>
               </a:rPr>
-              <a:t>Распределение</a:t>
+              <a:t>Глобальный оптимум</a:t>
             </a:r>
             <a:endParaRPr lang="en-US" sz="1900" dirty="0"/>
           </a:p>
@@ -3989,7 +3989,7 @@
                 <a:ea typeface="Arial" pitchFamily="34" charset="-122"/>
                 <a:cs typeface="Arial" pitchFamily="34" charset="-120"/>
               </a:rPr>
-              <a:t>По приоритету: высокий приоритет получает лучших исполнителей первым.</a:t>
+              <a:t>Венгерский алгоритм (задача о назначениях): максимум суммарного соответствия, а не жадный перебор.</a:t>
             </a:r>
             <a:endParaRPr lang="en-US" sz="1380" dirty="0"/>
           </a:p>
@@ -4222,7 +4222,7 @@
           </p:nvPr>
         </p:nvGraphicFramePr>
         <p:xfrm>
-          <a:off x="640080" y="1417320"/>
+          <a:off x="640080" y="1371600"/>
           <a:ext cx="10927080" cy="914400"/>
         </p:xfrm>
         <a:graphic>
@@ -4233,7 +4233,7 @@
                 <a:gridCol w="4023360"/>
                 <a:gridCol w="6903720"/>
               </a:tblGrid>
-              <a:tr h="566928">
+              <a:tr h="676656">
                 <a:tc>
                   <a:txBody>
                     <a:bodyPr/>
@@ -4371,7 +4371,7 @@
                   </a:tcPr>
                 </a:tc>
               </a:tr>
-              <a:tr h="566928">
+              <a:tr h="676656">
                 <a:tc>
                   <a:txBody>
                     <a:bodyPr/>
@@ -4381,7 +4381,7 @@
                         <a:buNone/>
                       </a:pPr>
                       <a:r>
-                        <a:rPr lang="en-US" sz="1450" b="1" dirty="0">
+                        <a:rPr lang="en-US" sz="1400" b="1" dirty="0">
                           <a:solidFill>
                             <a:srgbClr val="1F2340"/>
                           </a:solidFill>
@@ -4391,7 +4391,7 @@
                         </a:rPr>
                         <a:t>Подбор по компетенциям</a:t>
                       </a:r>
-                      <a:endParaRPr lang="en-US" sz="1450" dirty="0">
+                      <a:endParaRPr lang="en-US" sz="1400" dirty="0">
                         <a:latin typeface="Arial" charset="0"/>
                         <a:ea typeface="Arial" charset="0"/>
                         <a:cs typeface="Arial" charset="0"/>
@@ -4449,7 +4449,7 @@
                         <a:buNone/>
                       </a:pPr>
                       <a:r>
-                        <a:rPr lang="en-US" sz="1450" dirty="0">
+                        <a:rPr lang="en-US" sz="1400" dirty="0">
                           <a:solidFill>
                             <a:srgbClr val="1F2340"/>
                           </a:solidFill>
@@ -4459,7 +4459,7 @@
                         </a:rPr>
                         <a:t>Проверка покрытия навыков + оценка глубины владения</a:t>
                       </a:r>
-                      <a:endParaRPr lang="en-US" sz="1450" dirty="0">
+                      <a:endParaRPr lang="en-US" sz="1400" dirty="0">
                         <a:latin typeface="Arial" charset="0"/>
                         <a:ea typeface="Arial" charset="0"/>
                         <a:cs typeface="Arial" charset="0"/>
@@ -4509,7 +4509,7 @@
                   </a:tcPr>
                 </a:tc>
               </a:tr>
-              <a:tr h="566928">
+              <a:tr h="676656">
                 <a:tc>
                   <a:txBody>
                     <a:bodyPr/>
@@ -4519,7 +4519,7 @@
                         <a:buNone/>
                       </a:pPr>
                       <a:r>
-                        <a:rPr lang="en-US" sz="1450" b="1" dirty="0">
+                        <a:rPr lang="en-US" sz="1400" b="1" dirty="0">
                           <a:solidFill>
                             <a:srgbClr val="1F2340"/>
                           </a:solidFill>
@@ -4529,7 +4529,7 @@
                         </a:rPr>
                         <a:t>Учёт загрузки</a:t>
                       </a:r>
-                      <a:endParaRPr lang="en-US" sz="1450" dirty="0">
+                      <a:endParaRPr lang="en-US" sz="1400" dirty="0">
                         <a:latin typeface="Arial" charset="0"/>
                         <a:ea typeface="Arial" charset="0"/>
                         <a:cs typeface="Arial" charset="0"/>
@@ -4587,7 +4587,7 @@
                         <a:buNone/>
                       </a:pPr>
                       <a:r>
-                        <a:rPr lang="en-US" sz="1450" dirty="0">
+                        <a:rPr lang="en-US" sz="1400" dirty="0">
                           <a:solidFill>
                             <a:srgbClr val="1F2340"/>
                           </a:solidFill>
@@ -4597,7 +4597,7 @@
                         </a:rPr>
                         <a:t>Балансировка ёмкости на лету — без перегруза</a:t>
                       </a:r>
-                      <a:endParaRPr lang="en-US" sz="1450" dirty="0">
+                      <a:endParaRPr lang="en-US" sz="1400" dirty="0">
                         <a:latin typeface="Arial" charset="0"/>
                         <a:ea typeface="Arial" charset="0"/>
                         <a:cs typeface="Arial" charset="0"/>
@@ -4647,7 +4647,7 @@
                   </a:tcPr>
                 </a:tc>
               </a:tr>
-              <a:tr h="566928">
+              <a:tr h="676656">
                 <a:tc>
                   <a:txBody>
                     <a:bodyPr/>
@@ -4657,7 +4657,7 @@
                         <a:buNone/>
                       </a:pPr>
                       <a:r>
-                        <a:rPr lang="en-US" sz="1450" b="1" dirty="0">
+                        <a:rPr lang="en-US" sz="1400" b="1" dirty="0">
                           <a:solidFill>
                             <a:srgbClr val="1F2340"/>
                           </a:solidFill>
@@ -4667,7 +4667,7 @@
                         </a:rPr>
                         <a:t>Учёт приоритетов</a:t>
                       </a:r>
-                      <a:endParaRPr lang="en-US" sz="1450" dirty="0">
+                      <a:endParaRPr lang="en-US" sz="1400" dirty="0">
                         <a:latin typeface="Arial" charset="0"/>
                         <a:ea typeface="Arial" charset="0"/>
                         <a:cs typeface="Arial" charset="0"/>
@@ -4725,7 +4725,7 @@
                         <a:buNone/>
                       </a:pPr>
                       <a:r>
-                        <a:rPr lang="en-US" sz="1450" dirty="0">
+                        <a:rPr lang="en-US" sz="1400" dirty="0">
                           <a:solidFill>
                             <a:srgbClr val="1F2340"/>
                           </a:solidFill>
@@ -4735,7 +4735,7 @@
                         </a:rPr>
                         <a:t>Заявки обрабатываются по приоритету, затем по сроку</a:t>
                       </a:r>
-                      <a:endParaRPr lang="en-US" sz="1450" dirty="0">
+                      <a:endParaRPr lang="en-US" sz="1400" dirty="0">
                         <a:latin typeface="Arial" charset="0"/>
                         <a:ea typeface="Arial" charset="0"/>
                         <a:cs typeface="Arial" charset="0"/>
@@ -4785,7 +4785,7 @@
                   </a:tcPr>
                 </a:tc>
               </a:tr>
-              <a:tr h="566928">
+              <a:tr h="676656">
                 <a:tc>
                   <a:txBody>
                     <a:bodyPr/>
@@ -4795,7 +4795,7 @@
                         <a:buNone/>
                       </a:pPr>
                       <a:r>
-                        <a:rPr lang="en-US" sz="1450" b="1" dirty="0">
+                        <a:rPr lang="en-US" sz="1400" b="1" dirty="0">
                           <a:solidFill>
                             <a:srgbClr val="1F2340"/>
                           </a:solidFill>
@@ -4805,7 +4805,7 @@
                         </a:rPr>
                         <a:t>Прозрачность ресурсов</a:t>
                       </a:r>
-                      <a:endParaRPr lang="en-US" sz="1450" dirty="0">
+                      <a:endParaRPr lang="en-US" sz="1400" dirty="0">
                         <a:latin typeface="Arial" charset="0"/>
                         <a:ea typeface="Arial" charset="0"/>
                         <a:cs typeface="Arial" charset="0"/>
@@ -4863,7 +4863,7 @@
                         <a:buNone/>
                       </a:pPr>
                       <a:r>
-                        <a:rPr lang="en-US" sz="1450" dirty="0">
+                        <a:rPr lang="en-US" sz="1400" dirty="0">
                           <a:solidFill>
                             <a:srgbClr val="1F2340"/>
                           </a:solidFill>
@@ -4873,7 +4873,7 @@
                         </a:rPr>
                         <a:t>Объяснение каждого назначения + дашборд загрузки</a:t>
                       </a:r>
-                      <a:endParaRPr lang="en-US" sz="1450" dirty="0">
+                      <a:endParaRPr lang="en-US" sz="1400" dirty="0">
                         <a:latin typeface="Arial" charset="0"/>
                         <a:ea typeface="Arial" charset="0"/>
                         <a:cs typeface="Arial" charset="0"/>
@@ -4923,7 +4923,7 @@
                   </a:tcPr>
                 </a:tc>
               </a:tr>
-              <a:tr h="566928">
+              <a:tr h="676656">
                 <a:tc>
                   <a:txBody>
                     <a:bodyPr/>
@@ -4933,7 +4933,7 @@
                         <a:buNone/>
                       </a:pPr>
                       <a:r>
-                        <a:rPr lang="en-US" sz="1450" b="1" dirty="0">
+                        <a:rPr lang="en-US" sz="1400" b="1" dirty="0">
                           <a:solidFill>
                             <a:srgbClr val="1F2340"/>
                           </a:solidFill>
@@ -4941,9 +4941,9 @@
                           <a:ea typeface="Arial" pitchFamily="34" charset="-122"/>
                           <a:cs typeface="Arial" pitchFamily="34" charset="-120"/>
                         </a:rPr>
-                        <a:t>Без роста затрат</a:t>
+                        <a:t>Управление заявками и объявлениями</a:t>
                       </a:r>
-                      <a:endParaRPr lang="en-US" sz="1450" dirty="0">
+                      <a:endParaRPr lang="en-US" sz="1400" dirty="0">
                         <a:latin typeface="Arial" charset="0"/>
                         <a:ea typeface="Arial" charset="0"/>
                         <a:cs typeface="Arial" charset="0"/>
@@ -5001,7 +5001,7 @@
                         <a:buNone/>
                       </a:pPr>
                       <a:r>
-                        <a:rPr lang="en-US" sz="1450" dirty="0">
+                        <a:rPr lang="en-US" sz="1400" dirty="0">
                           <a:solidFill>
                             <a:srgbClr val="1F2340"/>
                           </a:solidFill>
@@ -5009,9 +5009,9 @@
                           <a:ea typeface="Arial" pitchFamily="34" charset="-122"/>
                           <a:cs typeface="Arial" pitchFamily="34" charset="-120"/>
                         </a:rPr>
-                        <a:t>Полностью автоматический прогон, ноль ручного труда</a:t>
+                        <a:t>CRUD заявок, пула исполнителей и объявлений (поиск эксперта / задача / событие)</a:t>
                       </a:r>
-                      <a:endParaRPr lang="en-US" sz="1450" dirty="0">
+                      <a:endParaRPr lang="en-US" sz="1400" dirty="0">
                         <a:latin typeface="Arial" charset="0"/>
                         <a:ea typeface="Arial" charset="0"/>
                         <a:cs typeface="Arial" charset="0"/>
@@ -5061,7 +5061,7 @@
                   </a:tcPr>
                 </a:tc>
               </a:tr>
-              <a:tr h="566928">
+              <a:tr h="676656">
                 <a:tc>
                   <a:txBody>
                     <a:bodyPr/>
@@ -5071,7 +5071,7 @@
                         <a:buNone/>
                       </a:pPr>
                       <a:r>
-                        <a:rPr lang="en-US" sz="1450" b="1" dirty="0">
+                        <a:rPr lang="en-US" sz="1400" b="1" dirty="0">
                           <a:solidFill>
                             <a:srgbClr val="1F2340"/>
                           </a:solidFill>
@@ -5079,9 +5079,9 @@
                           <a:ea typeface="Arial" pitchFamily="34" charset="-122"/>
                           <a:cs typeface="Arial" pitchFamily="34" charset="-120"/>
                         </a:rPr>
-                        <a:t>Управление заявками</a:t>
+                        <a:t>Гибкость координатора</a:t>
                       </a:r>
-                      <a:endParaRPr lang="en-US" sz="1450" dirty="0">
+                      <a:endParaRPr lang="en-US" sz="1400" dirty="0">
                         <a:latin typeface="Arial" charset="0"/>
                         <a:ea typeface="Arial" charset="0"/>
                         <a:cs typeface="Arial" charset="0"/>
@@ -5139,7 +5139,7 @@
                         <a:buNone/>
                       </a:pPr>
                       <a:r>
-                        <a:rPr lang="en-US" sz="1450" dirty="0">
+                        <a:rPr lang="en-US" sz="1400" dirty="0">
                           <a:solidFill>
                             <a:srgbClr val="1F2340"/>
                           </a:solidFill>
@@ -5147,9 +5147,9 @@
                           <a:ea typeface="Arial" pitchFamily="34" charset="-122"/>
                           <a:cs typeface="Arial" pitchFamily="34" charset="-120"/>
                         </a:rPr>
-                        <a:t>REST API приёма заявок и пула исполнителей</a:t>
+                        <a:t>Частичное покрытие («почти подходящий») + ручное переопределение</a:t>
                       </a:r>
-                      <a:endParaRPr lang="en-US" sz="1450" dirty="0">
+                      <a:endParaRPr lang="en-US" sz="1400" dirty="0">
                         <a:latin typeface="Arial" charset="0"/>
                         <a:ea typeface="Arial" charset="0"/>
                         <a:cs typeface="Arial" charset="0"/>
@@ -6023,7 +6023,7 @@
                 <a:ea typeface="Arial" pitchFamily="34" charset="-122"/>
                 <a:cs typeface="Arial" pitchFamily="34" charset="-120"/>
               </a:rPr>
-              <a:t>20</a:t>
+              <a:t>42</a:t>
             </a:r>
             <a:endParaRPr lang="en-US" sz="4000" dirty="0"/>
           </a:p>
@@ -6062,7 +6062,7 @@
                 <a:ea typeface="Arial" pitchFamily="34" charset="-122"/>
                 <a:cs typeface="Arial" pitchFamily="34" charset="-120"/>
               </a:rPr>
-              <a:t>тестов зелёные</a:t>
+              <a:t>теста зелёные</a:t>
             </a:r>
             <a:endParaRPr lang="en-US" sz="1500" dirty="0"/>
           </a:p>
@@ -6169,7 +6169,7 @@
                 <a:ea typeface="Arial" pitchFamily="34" charset="-122"/>
                 <a:cs typeface="Arial" pitchFamily="34" charset="-120"/>
               </a:rPr>
-              <a:t>навыки из текста заявки</a:t>
+              <a:t>навыки из текста (keywords/LLM)</a:t>
             </a:r>
             <a:endParaRPr lang="en-US" sz="1500" dirty="0"/>
           </a:p>
@@ -6237,7 +6237,7 @@
                 <a:ea typeface="Arial" pitchFamily="34" charset="-122"/>
                 <a:cs typeface="Arial" pitchFamily="34" charset="-120"/>
               </a:rPr>
-              <a:t>web</a:t>
+              <a:t>API</a:t>
             </a:r>
             <a:endParaRPr lang="en-US" sz="4000" dirty="0"/>
           </a:p>
@@ -6276,7 +6276,7 @@
                 <a:ea typeface="Arial" pitchFamily="34" charset="-122"/>
                 <a:cs typeface="Arial" pitchFamily="34" charset="-120"/>
               </a:rPr>
-              <a:t>приложение + БД (SQLite)</a:t>
+              <a:t>full-stack: UI ↔ FastAPI ↔ SQLite</a:t>
             </a:r>
             <a:endParaRPr lang="en-US" sz="1500" dirty="0"/>
           </a:p>
@@ -6507,7 +6507,7 @@
                 <a:ea typeface="Arial" pitchFamily="34" charset="-122"/>
                 <a:cs typeface="Arial" pitchFamily="34" charset="-120"/>
               </a:rPr>
-              <a:t>HTML / JS · экран назначений и загрузки</a:t>
+              <a:t>HTML / JS · ходит в REST API (full-stack)</a:t>
             </a:r>
             <a:endParaRPr lang="en-US" sz="1300" dirty="0"/>
           </a:p>
@@ -6653,7 +6653,7 @@
                 <a:ea typeface="Arial" pitchFamily="34" charset="-122"/>
                 <a:cs typeface="Arial" pitchFamily="34" charset="-120"/>
               </a:rPr>
-              <a:t>/assign · /dashboard · /experts · /requests</a:t>
+              <a:t>/dashboard · /announcements · /assign/manual</a:t>
             </a:r>
             <a:endParaRPr lang="en-US" sz="1300" dirty="0"/>
           </a:p>
@@ -6799,7 +6799,7 @@
                 <a:ea typeface="Arial" pitchFamily="34" charset="-122"/>
                 <a:cs typeface="Arial" pitchFamily="34" charset="-120"/>
               </a:rPr>
-              <a:t>ядро: оценка соответствия + распределение</a:t>
+              <a:t>венгерский алгоритм + частичное покрытие</a:t>
             </a:r>
             <a:endParaRPr lang="en-US" sz="1300" dirty="0"/>
           </a:p>
@@ -6945,7 +6945,7 @@
                 <a:ea typeface="Arial" pitchFamily="34" charset="-122"/>
                 <a:cs typeface="Arial" pitchFamily="34" charset="-120"/>
               </a:rPr>
-              <a:t>in-memory (MVP) → PostgreSQL</a:t>
+              <a:t>SQLite (WAL) · покрыт 42 тестами</a:t>
             </a:r>
             <a:endParaRPr lang="en-US" sz="1300" dirty="0"/>
           </a:p>
@@ -7662,7 +7662,7 @@
                 <a:ea typeface="Arial" pitchFamily="34" charset="-122"/>
                 <a:cs typeface="Arial" pitchFamily="34" charset="-120"/>
               </a:rPr>
-              <a:t>Движок матчинга, REST API, дашборд, 20 автотестов.</a:t>
+              <a:t>Венгерский алгоритм, REST API, дашборд, 42 автотеста.</a:t>
             </a:r>
             <a:endParaRPr lang="en-US" sz="1450" dirty="0"/>
           </a:p>
@@ -7968,7 +7968,7 @@
                 <a:ea typeface="Arial" pitchFamily="34" charset="-122"/>
                 <a:cs typeface="Arial" pitchFamily="34" charset="-120"/>
               </a:rPr>
-              <a:t>SQLite, веб-приложение (CRUD), AI-извлечение компетенций из текста.</a:t>
+              <a:t>SQLite, full-stack веб (CRUD), AI-извлечение, объявления, ручное назначение, частичное покрытие, доступность (a11y).</a:t>
             </a:r>
             <a:endParaRPr lang="en-US" sz="1450" dirty="0"/>
           </a:p>
@@ -8156,7 +8156,7 @@
                 <a:ea typeface="Arial" pitchFamily="34" charset="-122"/>
                 <a:cs typeface="Arial" pitchFamily="34" charset="-120"/>
               </a:rPr>
-              <a:t>Роли и авторизация, уведомления, прогноз сроков, авто-ребаланс нагрузки.</a:t>
+              <a:t>Роли и авторизация, уведомления, прогноз сроков, авто-ребаланс, облачный хостинг.</a:t>
             </a:r>
             <a:endParaRPr lang="en-US" sz="1450" dirty="0"/>
           </a:p>
